--- a/ppt.pptx
+++ b/ppt.pptx
@@ -9,6 +9,8 @@
     <p:sldId id="257" r:id="rId3"/>
     <p:sldId id="258" r:id="rId4"/>
     <p:sldId id="259" r:id="rId5"/>
+    <p:sldId id="260" r:id="rId6"/>
+    <p:sldId id="261" r:id="rId7"/>
   </p:sldIdLst>
   <p:sldSz cx="12192000" cy="6858000"/>
   <p:notesSz cx="6858000" cy="9144000"/>
@@ -107,6 +109,11 @@
       </a:defRPr>
     </a:lvl9pPr>
   </p:defaultTextStyle>
+  <p:extLst>
+    <p:ext uri="{EFAFB233-063F-42B5-8137-9DF3F51BA10A}">
+      <p15:sldGuideLst xmlns:p15="http://schemas.microsoft.com/office/powerpoint/2012/main"/>
+    </p:ext>
+  </p:extLst>
 </p:presentation>
 </file>
 
@@ -259,7 +266,7 @@
           <a:p>
             <a:fld id="{99D19B1C-E922-482A-991A-E5088CA13F62}" type="datetimeFigureOut">
               <a:rPr lang="en-IN" smtClean="0"/>
-              <a:t>12-10-2026</a:t>
+              <a:t>13-10-2026</a:t>
             </a:fld>
             <a:endParaRPr lang="en-IN"/>
           </a:p>
@@ -459,7 +466,7 @@
           <a:p>
             <a:fld id="{99D19B1C-E922-482A-991A-E5088CA13F62}" type="datetimeFigureOut">
               <a:rPr lang="en-IN" smtClean="0"/>
-              <a:t>12-10-2026</a:t>
+              <a:t>13-10-2026</a:t>
             </a:fld>
             <a:endParaRPr lang="en-IN"/>
           </a:p>
@@ -669,7 +676,7 @@
           <a:p>
             <a:fld id="{99D19B1C-E922-482A-991A-E5088CA13F62}" type="datetimeFigureOut">
               <a:rPr lang="en-IN" smtClean="0"/>
-              <a:t>12-10-2026</a:t>
+              <a:t>13-10-2026</a:t>
             </a:fld>
             <a:endParaRPr lang="en-IN"/>
           </a:p>
@@ -869,7 +876,7 @@
           <a:p>
             <a:fld id="{99D19B1C-E922-482A-991A-E5088CA13F62}" type="datetimeFigureOut">
               <a:rPr lang="en-IN" smtClean="0"/>
-              <a:t>12-10-2026</a:t>
+              <a:t>13-10-2026</a:t>
             </a:fld>
             <a:endParaRPr lang="en-IN"/>
           </a:p>
@@ -1145,7 +1152,7 @@
           <a:p>
             <a:fld id="{99D19B1C-E922-482A-991A-E5088CA13F62}" type="datetimeFigureOut">
               <a:rPr lang="en-IN" smtClean="0"/>
-              <a:t>12-10-2026</a:t>
+              <a:t>13-10-2026</a:t>
             </a:fld>
             <a:endParaRPr lang="en-IN"/>
           </a:p>
@@ -1413,7 +1420,7 @@
           <a:p>
             <a:fld id="{99D19B1C-E922-482A-991A-E5088CA13F62}" type="datetimeFigureOut">
               <a:rPr lang="en-IN" smtClean="0"/>
-              <a:t>12-10-2026</a:t>
+              <a:t>13-10-2026</a:t>
             </a:fld>
             <a:endParaRPr lang="en-IN"/>
           </a:p>
@@ -1828,7 +1835,7 @@
           <a:p>
             <a:fld id="{99D19B1C-E922-482A-991A-E5088CA13F62}" type="datetimeFigureOut">
               <a:rPr lang="en-IN" smtClean="0"/>
-              <a:t>12-10-2026</a:t>
+              <a:t>13-10-2026</a:t>
             </a:fld>
             <a:endParaRPr lang="en-IN"/>
           </a:p>
@@ -1970,7 +1977,7 @@
           <a:p>
             <a:fld id="{99D19B1C-E922-482A-991A-E5088CA13F62}" type="datetimeFigureOut">
               <a:rPr lang="en-IN" smtClean="0"/>
-              <a:t>12-10-2026</a:t>
+              <a:t>13-10-2026</a:t>
             </a:fld>
             <a:endParaRPr lang="en-IN"/>
           </a:p>
@@ -2083,7 +2090,7 @@
           <a:p>
             <a:fld id="{99D19B1C-E922-482A-991A-E5088CA13F62}" type="datetimeFigureOut">
               <a:rPr lang="en-IN" smtClean="0"/>
-              <a:t>12-10-2026</a:t>
+              <a:t>13-10-2026</a:t>
             </a:fld>
             <a:endParaRPr lang="en-IN"/>
           </a:p>
@@ -2396,7 +2403,7 @@
           <a:p>
             <a:fld id="{99D19B1C-E922-482A-991A-E5088CA13F62}" type="datetimeFigureOut">
               <a:rPr lang="en-IN" smtClean="0"/>
-              <a:t>12-10-2026</a:t>
+              <a:t>13-10-2026</a:t>
             </a:fld>
             <a:endParaRPr lang="en-IN"/>
           </a:p>
@@ -2685,7 +2692,7 @@
           <a:p>
             <a:fld id="{99D19B1C-E922-482A-991A-E5088CA13F62}" type="datetimeFigureOut">
               <a:rPr lang="en-IN" smtClean="0"/>
-              <a:t>12-10-2026</a:t>
+              <a:t>13-10-2026</a:t>
             </a:fld>
             <a:endParaRPr lang="en-IN"/>
           </a:p>
@@ -2928,7 +2935,7 @@
           <a:p>
             <a:fld id="{99D19B1C-E922-482A-991A-E5088CA13F62}" type="datetimeFigureOut">
               <a:rPr lang="en-IN" smtClean="0"/>
-              <a:t>12-10-2026</a:t>
+              <a:t>13-10-2026</a:t>
             </a:fld>
             <a:endParaRPr lang="en-IN"/>
           </a:p>
@@ -3524,6 +3531,7 @@
           </a:bodyPr>
           <a:lstStyle/>
           <a:p>
+            <a:pPr algn="just"/>
             <a:r>
               <a:rPr lang="en-IN" dirty="0">
                 <a:latin typeface="Times New Roman" panose="02020603050405020304" pitchFamily="18" charset="0"/>
@@ -3533,6 +3541,7 @@
             </a:r>
           </a:p>
           <a:p>
+            <a:pPr algn="just"/>
             <a:r>
               <a:rPr lang="en-IN" dirty="0">
                 <a:latin typeface="Times New Roman" panose="02020603050405020304" pitchFamily="18" charset="0"/>
@@ -3542,6 +3551,7 @@
             </a:r>
           </a:p>
           <a:p>
+            <a:pPr algn="just"/>
             <a:r>
               <a:rPr lang="en-IN" dirty="0">
                 <a:latin typeface="Times New Roman" panose="02020603050405020304" pitchFamily="18" charset="0"/>
@@ -3551,7 +3561,7 @@
             </a:r>
           </a:p>
           <a:p>
-            <a:pPr marL="0" indent="0">
+            <a:pPr marL="0" indent="0" algn="just">
               <a:buNone/>
             </a:pPr>
             <a:endParaRPr lang="en-IN" dirty="0">
@@ -3657,7 +3667,7 @@
           </a:bodyPr>
           <a:lstStyle/>
           <a:p>
-            <a:pPr marL="0" indent="0">
+            <a:pPr marL="0" indent="0" algn="just">
               <a:buNone/>
             </a:pPr>
             <a:r>
@@ -3669,7 +3679,7 @@
             </a:r>
           </a:p>
           <a:p>
-            <a:pPr marL="0" indent="0">
+            <a:pPr marL="0" indent="0" algn="just">
               <a:buNone/>
             </a:pPr>
             <a:r>
@@ -3688,7 +3698,7 @@
             </a:r>
           </a:p>
           <a:p>
-            <a:pPr marL="0" indent="0">
+            <a:pPr marL="0" indent="0" algn="just">
               <a:buNone/>
             </a:pPr>
             <a:endParaRPr lang="en-IN" sz="2400" dirty="0">
@@ -3697,7 +3707,7 @@
             </a:endParaRPr>
           </a:p>
           <a:p>
-            <a:pPr marL="0" indent="0">
+            <a:pPr marL="0" indent="0" algn="just">
               <a:buNone/>
             </a:pPr>
             <a:r>
@@ -3713,7 +3723,7 @@
             </a:endParaRPr>
           </a:p>
           <a:p>
-            <a:pPr lvl="0"/>
+            <a:pPr lvl="0" algn="just"/>
             <a:r>
               <a:rPr lang="en-IN" sz="2400" dirty="0">
                 <a:latin typeface="Times New Roman" panose="02020603050405020304" pitchFamily="18" charset="0"/>
@@ -3723,7 +3733,7 @@
             </a:r>
           </a:p>
           <a:p>
-            <a:pPr lvl="0"/>
+            <a:pPr lvl="0" algn="just"/>
             <a:r>
               <a:rPr lang="en-IN" sz="2400" dirty="0">
                 <a:latin typeface="Times New Roman" panose="02020603050405020304" pitchFamily="18" charset="0"/>
@@ -3733,7 +3743,7 @@
             </a:r>
           </a:p>
           <a:p>
-            <a:pPr lvl="0"/>
+            <a:pPr lvl="0" algn="just"/>
             <a:r>
               <a:rPr lang="en-IN" sz="2400" dirty="0">
                 <a:latin typeface="Times New Roman" panose="02020603050405020304" pitchFamily="18" charset="0"/>
@@ -3743,7 +3753,7 @@
             </a:r>
           </a:p>
           <a:p>
-            <a:pPr lvl="0"/>
+            <a:pPr lvl="0" algn="just"/>
             <a:r>
               <a:rPr lang="en-IN" sz="2400" dirty="0">
                 <a:latin typeface="Times New Roman" panose="02020603050405020304" pitchFamily="18" charset="0"/>
@@ -3753,7 +3763,7 @@
             </a:r>
           </a:p>
           <a:p>
-            <a:pPr lvl="0"/>
+            <a:pPr lvl="0" algn="just"/>
             <a:r>
               <a:rPr lang="en-IN" sz="2400" dirty="0">
                 <a:latin typeface="Times New Roman" panose="02020603050405020304" pitchFamily="18" charset="0"/>
@@ -3763,7 +3773,7 @@
             </a:r>
           </a:p>
           <a:p>
-            <a:pPr lvl="0"/>
+            <a:pPr lvl="0" algn="just"/>
             <a:r>
               <a:rPr lang="en-IN" sz="2400" dirty="0">
                 <a:latin typeface="Times New Roman" panose="02020603050405020304" pitchFamily="18" charset="0"/>
@@ -3773,7 +3783,7 @@
             </a:r>
           </a:p>
           <a:p>
-            <a:pPr lvl="0"/>
+            <a:pPr lvl="0" algn="just"/>
             <a:r>
               <a:rPr lang="en-IN" sz="2400" dirty="0">
                 <a:latin typeface="Times New Roman" panose="02020603050405020304" pitchFamily="18" charset="0"/>
@@ -3783,7 +3793,7 @@
             </a:r>
           </a:p>
           <a:p>
-            <a:pPr marL="0" indent="0">
+            <a:pPr marL="0" indent="0" algn="just">
               <a:buNone/>
             </a:pPr>
             <a:endParaRPr lang="en-IN" sz="2400" dirty="0">
@@ -3792,7 +3802,7 @@
             </a:endParaRPr>
           </a:p>
           <a:p>
-            <a:pPr marL="0" indent="0">
+            <a:pPr marL="0" indent="0" algn="just">
               <a:buNone/>
             </a:pPr>
             <a:endParaRPr lang="en-IN" sz="2400" dirty="0">
@@ -3848,12 +3858,25 @@
             <p:ph type="title"/>
           </p:nvPr>
         </p:nvSpPr>
-        <p:spPr/>
-        <p:txBody>
-          <a:bodyPr/>
-          <a:lstStyle/>
-          <a:p>
-            <a:endParaRPr lang="en-IN"/>
+        <p:spPr>
+          <a:xfrm>
+            <a:off x="838200" y="1"/>
+            <a:ext cx="10515600" cy="1045028"/>
+          </a:xfrm>
+        </p:spPr>
+        <p:txBody>
+          <a:bodyPr>
+            <a:normAutofit fontScale="90000"/>
+          </a:bodyPr>
+          <a:lstStyle/>
+          <a:p>
+            <a:r>
+              <a:rPr lang="en-IN" sz="4000" b="1" dirty="0">
+                <a:latin typeface="Times New Roman" panose="02020603050405020304" pitchFamily="18" charset="0"/>
+                <a:cs typeface="Times New Roman" panose="02020603050405020304" pitchFamily="18" charset="0"/>
+              </a:rPr>
+              <a:t>Research Gaps Identified from Literature Review</a:t>
+            </a:r>
           </a:p>
         </p:txBody>
       </p:sp>
@@ -3873,12 +3896,109 @@
             <p:ph idx="1"/>
           </p:nvPr>
         </p:nvSpPr>
-        <p:spPr/>
-        <p:txBody>
-          <a:bodyPr/>
-          <a:lstStyle/>
-          <a:p>
-            <a:endParaRPr lang="en-IN"/>
+        <p:spPr>
+          <a:xfrm>
+            <a:off x="195943" y="1159329"/>
+            <a:ext cx="11691257" cy="5551714"/>
+          </a:xfrm>
+        </p:spPr>
+        <p:txBody>
+          <a:bodyPr>
+            <a:normAutofit/>
+          </a:bodyPr>
+          <a:lstStyle/>
+          <a:p>
+            <a:pPr marL="0" indent="0" algn="just">
+              <a:buNone/>
+            </a:pPr>
+            <a:r>
+              <a:rPr lang="en-IN" b="1" dirty="0">
+                <a:latin typeface="Times New Roman" panose="02020603050405020304" pitchFamily="18" charset="0"/>
+                <a:cs typeface="Times New Roman" panose="02020603050405020304" pitchFamily="18" charset="0"/>
+              </a:rPr>
+              <a:t>1. Limited Targeted Generation of Rare Attack Samples</a:t>
+            </a:r>
+            <a:endParaRPr lang="en-IN" dirty="0">
+              <a:latin typeface="Times New Roman" panose="02020603050405020304" pitchFamily="18" charset="0"/>
+              <a:cs typeface="Times New Roman" panose="02020603050405020304" pitchFamily="18" charset="0"/>
+            </a:endParaRPr>
+          </a:p>
+          <a:p>
+            <a:pPr marL="0" indent="0" algn="just">
+              <a:buNone/>
+            </a:pPr>
+            <a:r>
+              <a:rPr lang="en-IN" dirty="0">
+                <a:latin typeface="Times New Roman" panose="02020603050405020304" pitchFamily="18" charset="0"/>
+                <a:cs typeface="Times New Roman" panose="02020603050405020304" pitchFamily="18" charset="0"/>
+              </a:rPr>
+              <a:t>       Existing GAN-based approaches address class imbalance, but there is scope to investigate targeted synthetic data generation for highly underrepresented attack categories in the UNSW-NB15 dataset.</a:t>
+            </a:r>
+          </a:p>
+          <a:p>
+            <a:pPr marL="0" indent="0" algn="just">
+              <a:buNone/>
+            </a:pPr>
+            <a:r>
+              <a:rPr lang="en-IN" b="1" dirty="0">
+                <a:latin typeface="Times New Roman" panose="02020603050405020304" pitchFamily="18" charset="0"/>
+                <a:cs typeface="Times New Roman" panose="02020603050405020304" pitchFamily="18" charset="0"/>
+              </a:rPr>
+              <a:t>2. Need for a Simpler CTGAN-Based Framework</a:t>
+            </a:r>
+            <a:endParaRPr lang="en-IN" dirty="0">
+              <a:latin typeface="Times New Roman" panose="02020603050405020304" pitchFamily="18" charset="0"/>
+              <a:cs typeface="Times New Roman" panose="02020603050405020304" pitchFamily="18" charset="0"/>
+            </a:endParaRPr>
+          </a:p>
+          <a:p>
+            <a:pPr marL="0" indent="0" algn="just">
+              <a:buNone/>
+            </a:pPr>
+            <a:r>
+              <a:rPr lang="en-IN" dirty="0">
+                <a:latin typeface="Times New Roman" panose="02020603050405020304" pitchFamily="18" charset="0"/>
+                <a:cs typeface="Times New Roman" panose="02020603050405020304" pitchFamily="18" charset="0"/>
+              </a:rPr>
+              <a:t>     Some existing approaches use complex architectures, multiple GAN variants, or ensemble models. A simpler CTGAN-based pipeline can be investigated for targeted minority-class augmentation.</a:t>
+            </a:r>
+          </a:p>
+          <a:p>
+            <a:pPr marL="0" indent="0" algn="just">
+              <a:buNone/>
+            </a:pPr>
+            <a:r>
+              <a:rPr lang="en-IN" b="1" dirty="0">
+                <a:latin typeface="Times New Roman" panose="02020603050405020304" pitchFamily="18" charset="0"/>
+                <a:cs typeface="Times New Roman" panose="02020603050405020304" pitchFamily="18" charset="0"/>
+              </a:rPr>
+              <a:t>3.  Limited Evaluation of Real-Only vs. Augmented Training Data</a:t>
+            </a:r>
+            <a:endParaRPr lang="en-IN" dirty="0">
+              <a:latin typeface="Times New Roman" panose="02020603050405020304" pitchFamily="18" charset="0"/>
+              <a:cs typeface="Times New Roman" panose="02020603050405020304" pitchFamily="18" charset="0"/>
+            </a:endParaRPr>
+          </a:p>
+          <a:p>
+            <a:pPr marL="0" indent="0" algn="just">
+              <a:buNone/>
+            </a:pPr>
+            <a:r>
+              <a:rPr lang="en-IN" dirty="0">
+                <a:latin typeface="Times New Roman" panose="02020603050405020304" pitchFamily="18" charset="0"/>
+                <a:cs typeface="Times New Roman" panose="02020603050405020304" pitchFamily="18" charset="0"/>
+              </a:rPr>
+              <a:t>       The effect of adding synthetic attack samples needs to be assessed through a direct comparison between a classifier trained on real data and one trained on real-plus-synthetic data.</a:t>
+            </a:r>
+          </a:p>
+          <a:p>
+            <a:pPr marL="0" indent="0" algn="just">
+              <a:buNone/>
+            </a:pPr>
+            <a:endParaRPr lang="en-IN" dirty="0">
+              <a:latin typeface="Times New Roman" panose="02020603050405020304" pitchFamily="18" charset="0"/>
+              <a:cs typeface="Times New Roman" panose="02020603050405020304" pitchFamily="18" charset="0"/>
+            </a:endParaRPr>
           </a:p>
         </p:txBody>
       </p:sp>
@@ -3886,6 +4006,263 @@
     <p:extLst>
       <p:ext uri="{BB962C8B-B14F-4D97-AF65-F5344CB8AC3E}">
         <p14:creationId xmlns:p14="http://schemas.microsoft.com/office/powerpoint/2010/main" val="2935085632"/>
+      </p:ext>
+    </p:extLst>
+  </p:cSld>
+  <p:clrMapOvr>
+    <a:masterClrMapping/>
+  </p:clrMapOvr>
+</p:sld>
+</file>
+
+<file path=ppt/slides/slide5.xml><?xml version="1.0" encoding="utf-8"?>
+<p:sld xmlns:a="http://schemas.openxmlformats.org/drawingml/2006/main" xmlns:r="http://schemas.openxmlformats.org/officeDocument/2006/relationships" xmlns:p="http://schemas.openxmlformats.org/presentationml/2006/main">
+  <p:cSld>
+    <p:spTree>
+      <p:nvGrpSpPr>
+        <p:cNvPr id="1" name=""/>
+        <p:cNvGrpSpPr/>
+        <p:nvPr/>
+      </p:nvGrpSpPr>
+      <p:grpSpPr>
+        <a:xfrm>
+          <a:off x="0" y="0"/>
+          <a:ext cx="0" cy="0"/>
+          <a:chOff x="0" y="0"/>
+          <a:chExt cx="0" cy="0"/>
+        </a:xfrm>
+      </p:grpSpPr>
+      <p:sp>
+        <p:nvSpPr>
+          <p:cNvPr id="3" name="Content Placeholder 2">
+            <a:extLst>
+              <a:ext uri="{FF2B5EF4-FFF2-40B4-BE49-F238E27FC236}">
+                <a16:creationId xmlns:a16="http://schemas.microsoft.com/office/drawing/2014/main" id="{C3E58E87-E6DD-ADDB-5FE4-7DB8BD019483}"/>
+              </a:ext>
+            </a:extLst>
+          </p:cNvPr>
+          <p:cNvSpPr>
+            <a:spLocks noGrp="1"/>
+          </p:cNvSpPr>
+          <p:nvPr>
+            <p:ph idx="1"/>
+          </p:nvPr>
+        </p:nvSpPr>
+        <p:spPr>
+          <a:xfrm>
+            <a:off x="261257" y="424543"/>
+            <a:ext cx="11609614" cy="6172200"/>
+          </a:xfrm>
+        </p:spPr>
+        <p:txBody>
+          <a:bodyPr>
+            <a:noAutofit/>
+          </a:bodyPr>
+          <a:lstStyle/>
+          <a:p>
+            <a:pPr marL="0" indent="0" algn="just">
+              <a:buNone/>
+            </a:pPr>
+            <a:r>
+              <a:rPr lang="en-US" b="1" dirty="0">
+                <a:latin typeface="Times New Roman" panose="02020603050405020304" pitchFamily="18" charset="0"/>
+                <a:cs typeface="Times New Roman" panose="02020603050405020304" pitchFamily="18" charset="0"/>
+              </a:rPr>
+              <a:t>4. </a:t>
+            </a:r>
+            <a:r>
+              <a:rPr lang="en-IN" b="1" dirty="0">
+                <a:latin typeface="Times New Roman" panose="02020603050405020304" pitchFamily="18" charset="0"/>
+                <a:cs typeface="Times New Roman" panose="02020603050405020304" pitchFamily="18" charset="0"/>
+              </a:rPr>
+              <a:t>Need for Synthetic Data Validation</a:t>
+            </a:r>
+            <a:endParaRPr lang="en-IN" dirty="0">
+              <a:latin typeface="Times New Roman" panose="02020603050405020304" pitchFamily="18" charset="0"/>
+              <a:cs typeface="Times New Roman" panose="02020603050405020304" pitchFamily="18" charset="0"/>
+            </a:endParaRPr>
+          </a:p>
+          <a:p>
+            <a:pPr marL="0" indent="0" algn="just">
+              <a:buNone/>
+            </a:pPr>
+            <a:r>
+              <a:rPr lang="en-IN" dirty="0">
+                <a:latin typeface="Times New Roman" panose="02020603050405020304" pitchFamily="18" charset="0"/>
+                <a:cs typeface="Times New Roman" panose="02020603050405020304" pitchFamily="18" charset="0"/>
+              </a:rPr>
+              <a:t>       Generating synthetic records does not automatically guarantee realistic network traffic. Statistical properties and feature distributions should be compared with the original minority-class data.</a:t>
+            </a:r>
+          </a:p>
+          <a:p>
+            <a:pPr marL="0" indent="0" algn="just">
+              <a:buNone/>
+            </a:pPr>
+            <a:r>
+              <a:rPr lang="en-IN" b="1" dirty="0">
+                <a:latin typeface="Times New Roman" panose="02020603050405020304" pitchFamily="18" charset="0"/>
+                <a:cs typeface="Times New Roman" panose="02020603050405020304" pitchFamily="18" charset="0"/>
+              </a:rPr>
+              <a:t>5.  Limited Focus on Class-Specific Detection Performance</a:t>
+            </a:r>
+            <a:endParaRPr lang="en-IN" dirty="0">
+              <a:latin typeface="Times New Roman" panose="02020603050405020304" pitchFamily="18" charset="0"/>
+              <a:cs typeface="Times New Roman" panose="02020603050405020304" pitchFamily="18" charset="0"/>
+            </a:endParaRPr>
+          </a:p>
+          <a:p>
+            <a:pPr marL="0" indent="0" algn="just">
+              <a:buNone/>
+            </a:pPr>
+            <a:r>
+              <a:rPr lang="en-IN" dirty="0">
+                <a:latin typeface="Times New Roman" panose="02020603050405020304" pitchFamily="18" charset="0"/>
+                <a:cs typeface="Times New Roman" panose="02020603050405020304" pitchFamily="18" charset="0"/>
+              </a:rPr>
+              <a:t>        Overall accuracy may not adequately represent performance on rare attacks. Minority-class precision, recall, and F1-score should also be evaluated.</a:t>
+            </a:r>
+          </a:p>
+          <a:p>
+            <a:pPr marL="0" indent="0" algn="just">
+              <a:buNone/>
+            </a:pPr>
+            <a:r>
+              <a:rPr lang="en-IN" b="1" dirty="0">
+                <a:latin typeface="Times New Roman" panose="02020603050405020304" pitchFamily="18" charset="0"/>
+                <a:cs typeface="Times New Roman" panose="02020603050405020304" pitchFamily="18" charset="0"/>
+              </a:rPr>
+              <a:t>6. Opportunity to Combine Synthetic Generation with Existing IDS Classifiers</a:t>
+            </a:r>
+            <a:endParaRPr lang="en-IN" dirty="0">
+              <a:latin typeface="Times New Roman" panose="02020603050405020304" pitchFamily="18" charset="0"/>
+              <a:cs typeface="Times New Roman" panose="02020603050405020304" pitchFamily="18" charset="0"/>
+            </a:endParaRPr>
+          </a:p>
+          <a:p>
+            <a:pPr marL="0" indent="0" algn="just">
+              <a:buNone/>
+            </a:pPr>
+            <a:r>
+              <a:rPr lang="en-IN" dirty="0">
+                <a:latin typeface="Times New Roman" panose="02020603050405020304" pitchFamily="18" charset="0"/>
+                <a:cs typeface="Times New Roman" panose="02020603050405020304" pitchFamily="18" charset="0"/>
+              </a:rPr>
+              <a:t>       Research on CNN-LSTM, reinforcement learning, and cost-sensitive learning explores alternative detection strategies. This project investigates CTGAN-based augmentation with a Random Forest classifier as a focused experimental approach.</a:t>
+            </a:r>
+          </a:p>
+          <a:p>
+            <a:pPr marL="0" indent="0" algn="just">
+              <a:buNone/>
+            </a:pPr>
+            <a:endParaRPr lang="en-IN" dirty="0">
+              <a:latin typeface="Times New Roman" panose="02020603050405020304" pitchFamily="18" charset="0"/>
+              <a:cs typeface="Times New Roman" panose="02020603050405020304" pitchFamily="18" charset="0"/>
+            </a:endParaRPr>
+          </a:p>
+        </p:txBody>
+      </p:sp>
+    </p:spTree>
+    <p:extLst>
+      <p:ext uri="{BB962C8B-B14F-4D97-AF65-F5344CB8AC3E}">
+        <p14:creationId xmlns:p14="http://schemas.microsoft.com/office/powerpoint/2010/main" val="1986728059"/>
+      </p:ext>
+    </p:extLst>
+  </p:cSld>
+  <p:clrMapOvr>
+    <a:masterClrMapping/>
+  </p:clrMapOvr>
+</p:sld>
+</file>
+
+<file path=ppt/slides/slide6.xml><?xml version="1.0" encoding="utf-8"?>
+<p:sld xmlns:a="http://schemas.openxmlformats.org/drawingml/2006/main" xmlns:r="http://schemas.openxmlformats.org/officeDocument/2006/relationships" xmlns:p="http://schemas.openxmlformats.org/presentationml/2006/main">
+  <p:cSld>
+    <p:spTree>
+      <p:nvGrpSpPr>
+        <p:cNvPr id="1" name=""/>
+        <p:cNvGrpSpPr/>
+        <p:nvPr/>
+      </p:nvGrpSpPr>
+      <p:grpSpPr>
+        <a:xfrm>
+          <a:off x="0" y="0"/>
+          <a:ext cx="0" cy="0"/>
+          <a:chOff x="0" y="0"/>
+          <a:chExt cx="0" cy="0"/>
+        </a:xfrm>
+      </p:grpSpPr>
+      <p:sp>
+        <p:nvSpPr>
+          <p:cNvPr id="2" name="Title 1">
+            <a:extLst>
+              <a:ext uri="{FF2B5EF4-FFF2-40B4-BE49-F238E27FC236}">
+                <a16:creationId xmlns:a16="http://schemas.microsoft.com/office/drawing/2014/main" id="{7F9130E4-E4F2-BB9A-0E9D-9974654A0E95}"/>
+              </a:ext>
+            </a:extLst>
+          </p:cNvPr>
+          <p:cNvSpPr>
+            <a:spLocks noGrp="1"/>
+          </p:cNvSpPr>
+          <p:nvPr>
+            <p:ph type="title"/>
+          </p:nvPr>
+        </p:nvSpPr>
+        <p:spPr>
+          <a:xfrm>
+            <a:off x="838200" y="163286"/>
+            <a:ext cx="10515600" cy="832758"/>
+          </a:xfrm>
+        </p:spPr>
+        <p:txBody>
+          <a:bodyPr>
+            <a:normAutofit/>
+          </a:bodyPr>
+          <a:lstStyle/>
+          <a:p>
+            <a:r>
+              <a:rPr lang="en-IN" sz="4000" b="1" dirty="0">
+                <a:latin typeface="Times New Roman" panose="02020603050405020304" pitchFamily="18" charset="0"/>
+                <a:cs typeface="Times New Roman" panose="02020603050405020304" pitchFamily="18" charset="0"/>
+              </a:rPr>
+              <a:t>Proposed Methodology</a:t>
+            </a:r>
+          </a:p>
+        </p:txBody>
+      </p:sp>
+      <p:pic>
+        <p:nvPicPr>
+          <p:cNvPr id="5" name="Picture 4">
+            <a:extLst>
+              <a:ext uri="{FF2B5EF4-FFF2-40B4-BE49-F238E27FC236}">
+                <a16:creationId xmlns:a16="http://schemas.microsoft.com/office/drawing/2014/main" id="{A7F419D4-B8FC-E46D-1F27-A44431E9B73C}"/>
+              </a:ext>
+            </a:extLst>
+          </p:cNvPr>
+          <p:cNvPicPr>
+            <a:picLocks noChangeAspect="1"/>
+          </p:cNvPicPr>
+          <p:nvPr/>
+        </p:nvPicPr>
+        <p:blipFill>
+          <a:blip r:embed="rId2"/>
+          <a:stretch>
+            <a:fillRect/>
+          </a:stretch>
+        </p:blipFill>
+        <p:spPr>
+          <a:xfrm>
+            <a:off x="996043" y="1126670"/>
+            <a:ext cx="10727871" cy="5388429"/>
+          </a:xfrm>
+          <a:prstGeom prst="rect">
+            <a:avLst/>
+          </a:prstGeom>
+        </p:spPr>
+      </p:pic>
+    </p:spTree>
+    <p:extLst>
+      <p:ext uri="{BB962C8B-B14F-4D97-AF65-F5344CB8AC3E}">
+        <p14:creationId xmlns:p14="http://schemas.microsoft.com/office/powerpoint/2010/main" val="2282163788"/>
       </p:ext>
     </p:extLst>
   </p:cSld>
